--- a/test-corpus/word-verification/direction-and-asymmetric-shape.pptx
+++ b/test-corpus/word-verification/direction-and-asymmetric-shape.pptx
@@ -144,8 +144,8 @@
         </p:nvSpPr>
         <p:spPr>
           <a:xfrm>
-            <a:off x="10421384" y="3251846"/>
-            <a:ext cx="1313416" cy="925810"/>
+            <a:off x="6672697" y="3425998"/>
+            <a:ext cx="819287" cy="577505"/>
           </a:xfrm>
           <a:prstGeom prst="rect">
             <a:avLst/>
@@ -153,7 +153,7 @@
           <a:solidFill>
             <a:srgbClr val="D9E2F3"/>
           </a:solidFill>
-          <a:ln w="16459" cap="flat" cmpd="sng" algn="ctr">
+          <a:ln w="10267" cap="flat" cmpd="sng" algn="ctr">
             <a:solidFill>
               <a:srgbClr val="2F5496"/>
             </a:solidFill>
@@ -177,7 +177,7 @@
           </a:fontRef>
         </p:style>
         <p:txBody>
-          <a:bodyPr rot="0" spcFirstLastPara="0" vertOverflow="overflow" horzOverflow="overflow" vert="horz" wrap="square" lIns="118504" tIns="59252" rIns="118504" bIns="59252" numCol="1" spcCol="0" rtlCol="0" fromWordArt="0" anchor="ctr" anchorCtr="0" forceAA="0" compatLnSpc="1">
+          <a:bodyPr rot="0" spcFirstLastPara="0" vertOverflow="overflow" horzOverflow="overflow" vert="horz" wrap="square" lIns="73921" tIns="36960" rIns="73921" bIns="36960" numCol="1" spcCol="0" rtlCol="0" fromWordArt="0" anchor="ctr" anchorCtr="0" forceAA="0" compatLnSpc="1">
             <a:prstTxWarp prst="textNoShape">
               <a:avLst/>
             </a:prstTxWarp>
@@ -194,7 +194,7 @@
               </a:spcAft>
             </a:pPr>
             <a:r>
-              <a:rPr lang="en-US" sz="1555" dirty="0">
+              <a:rPr lang="en-US" sz="950" dirty="0">
                 <a:solidFill>
                   <a:srgbClr val="000000"/>
                 </a:solidFill>
@@ -212,8 +212,8 @@
         </p:nvSpPr>
         <p:spPr>
           <a:xfrm>
-            <a:off x="7083531" y="3066684"/>
-            <a:ext cx="2350323" cy="1296134"/>
+            <a:off x="4590598" y="3310497"/>
+            <a:ext cx="1466093" cy="808507"/>
           </a:xfrm>
           <a:prstGeom prst="homePlate">
             <a:avLst/>
@@ -221,7 +221,7 @@
           <a:solidFill>
             <a:srgbClr val="D9E2F3"/>
           </a:solidFill>
-          <a:ln w="16459" cap="flat" cmpd="sng" algn="ctr">
+          <a:ln w="10267" cap="flat" cmpd="sng" algn="ctr">
             <a:solidFill>
               <a:srgbClr val="2F5496"/>
             </a:solidFill>
@@ -245,7 +245,7 @@
           </a:fontRef>
         </p:style>
         <p:txBody>
-          <a:bodyPr rot="0" spcFirstLastPara="0" vertOverflow="overflow" horzOverflow="overflow" vert="horz" wrap="square" lIns="118504" tIns="59252" rIns="118504" bIns="59252" numCol="1" spcCol="0" rtlCol="0" fromWordArt="0" anchor="ctr" anchorCtr="0" forceAA="0" compatLnSpc="1">
+          <a:bodyPr rot="0" spcFirstLastPara="0" vertOverflow="overflow" horzOverflow="overflow" vert="horz" wrap="square" lIns="73921" tIns="36960" rIns="73921" bIns="36960" numCol="1" spcCol="0" rtlCol="0" fromWordArt="0" anchor="ctr" anchorCtr="0" forceAA="0" compatLnSpc="1">
             <a:prstTxWarp prst="textNoShape">
               <a:avLst/>
             </a:prstTxWarp>
@@ -262,7 +262,7 @@
               </a:spcAft>
             </a:pPr>
             <a:r>
-              <a:rPr lang="en-US" sz="1555" dirty="0">
+              <a:rPr lang="en-US" sz="950" dirty="0">
                 <a:solidFill>
                   <a:srgbClr val="000000"/>
                 </a:solidFill>
@@ -280,8 +280,8 @@
         </p:nvSpPr>
         <p:spPr>
           <a:xfrm>
-            <a:off x="2402635" y="2788940"/>
-            <a:ext cx="3693365" cy="1851620"/>
+            <a:off x="1670731" y="3137245"/>
+            <a:ext cx="2303861" cy="1155011"/>
           </a:xfrm>
           <a:prstGeom prst="diamond">
             <a:avLst/>
@@ -289,7 +289,7 @@
           <a:solidFill>
             <a:srgbClr val="D9E2F3"/>
           </a:solidFill>
-          <a:ln w="16459" cap="flat" cmpd="sng" algn="ctr">
+          <a:ln w="10267" cap="flat" cmpd="sng" algn="ctr">
             <a:solidFill>
               <a:srgbClr val="2F5496"/>
             </a:solidFill>
@@ -313,7 +313,7 @@
           </a:fontRef>
         </p:style>
         <p:txBody>
-          <a:bodyPr rot="0" spcFirstLastPara="0" vertOverflow="overflow" horzOverflow="overflow" vert="horz" wrap="square" lIns="118504" tIns="59252" rIns="118504" bIns="59252" numCol="1" spcCol="0" rtlCol="0" fromWordArt="0" anchor="ctr" anchorCtr="0" forceAA="0" compatLnSpc="1">
+          <a:bodyPr rot="0" spcFirstLastPara="0" vertOverflow="overflow" horzOverflow="overflow" vert="horz" wrap="square" lIns="73921" tIns="36960" rIns="73921" bIns="36960" numCol="1" spcCol="0" rtlCol="0" fromWordArt="0" anchor="ctr" anchorCtr="0" forceAA="0" compatLnSpc="1">
             <a:prstTxWarp prst="textNoShape">
               <a:avLst/>
             </a:prstTxWarp>
@@ -330,7 +330,7 @@
               </a:spcAft>
             </a:pPr>
             <a:r>
-              <a:rPr lang="en-US" sz="1555" dirty="0">
+              <a:rPr lang="en-US" sz="950" dirty="0">
                 <a:solidFill>
                   <a:srgbClr val="000000"/>
                 </a:solidFill>
@@ -348,8 +348,8 @@
         </p:nvSpPr>
         <p:spPr>
           <a:xfrm>
-            <a:off x="457200" y="3251846"/>
-            <a:ext cx="957905" cy="925810"/>
+            <a:off x="457200" y="3425998"/>
+            <a:ext cx="597525" cy="577505"/>
           </a:xfrm>
           <a:prstGeom prst="rect">
             <a:avLst/>
@@ -357,7 +357,7 @@
           <a:solidFill>
             <a:srgbClr val="D9E2F3"/>
           </a:solidFill>
-          <a:ln w="16459" cap="flat" cmpd="sng" algn="ctr">
+          <a:ln w="10267" cap="flat" cmpd="sng" algn="ctr">
             <a:solidFill>
               <a:srgbClr val="2F5496"/>
             </a:solidFill>
@@ -381,7 +381,7 @@
           </a:fontRef>
         </p:style>
         <p:txBody>
-          <a:bodyPr rot="0" spcFirstLastPara="0" vertOverflow="overflow" horzOverflow="overflow" vert="horz" wrap="square" lIns="118504" tIns="59252" rIns="118504" bIns="59252" numCol="1" spcCol="0" rtlCol="0" fromWordArt="0" anchor="ctr" anchorCtr="0" forceAA="0" compatLnSpc="1">
+          <a:bodyPr rot="0" spcFirstLastPara="0" vertOverflow="overflow" horzOverflow="overflow" vert="horz" wrap="square" lIns="73921" tIns="36960" rIns="73921" bIns="36960" numCol="1" spcCol="0" rtlCol="0" fromWordArt="0" anchor="ctr" anchorCtr="0" forceAA="0" compatLnSpc="1">
             <a:prstTxWarp prst="textNoShape">
               <a:avLst/>
             </a:prstTxWarp>
@@ -398,7 +398,7 @@
               </a:spcAft>
             </a:pPr>
             <a:r>
-              <a:rPr lang="en-US" sz="1555" dirty="0">
+              <a:rPr lang="en-US" sz="950" dirty="0">
                 <a:solidFill>
                   <a:srgbClr val="000000"/>
                 </a:solidFill>
@@ -419,13 +419,13 @@
         </p:nvCxnSpPr>
         <p:spPr>
           <a:xfrm flipH="1">
-            <a:off x="9433854" y="3714750"/>
-            <a:ext cx="987531" cy="0"/>
+            <a:off x="6056691" y="3714750"/>
+            <a:ext cx="616006" cy="0"/>
           </a:xfrm>
           <a:prstGeom prst="line">
             <a:avLst/>
           </a:prstGeom>
-          <a:ln w="16459" cap="flat" cmpd="sng" algn="ctr">
+          <a:ln w="10267" cap="flat" cmpd="sng" algn="ctr">
             <a:solidFill>
               <a:srgbClr val="2F5496"/>
             </a:solidFill>
@@ -459,13 +459,13 @@
         </p:nvCxnSpPr>
         <p:spPr>
           <a:xfrm flipH="1">
-            <a:off x="6096000" y="3714750"/>
-            <a:ext cx="987531" cy="0"/>
+            <a:off x="3974592" y="3714750"/>
+            <a:ext cx="616006" cy="0"/>
           </a:xfrm>
           <a:prstGeom prst="line">
             <a:avLst/>
           </a:prstGeom>
-          <a:ln w="16459" cap="flat" cmpd="sng" algn="ctr">
+          <a:ln w="10267" cap="flat" cmpd="sng" algn="ctr">
             <a:solidFill>
               <a:srgbClr val="2F5496"/>
             </a:solidFill>
@@ -499,13 +499,13 @@
         </p:nvCxnSpPr>
         <p:spPr>
           <a:xfrm flipH="1">
-            <a:off x="1415105" y="3714750"/>
-            <a:ext cx="987531" cy="0"/>
+            <a:off x="1054725" y="3714750"/>
+            <a:ext cx="616006" cy="0"/>
           </a:xfrm>
           <a:prstGeom prst="line">
             <a:avLst/>
           </a:prstGeom>
-          <a:ln w="16459" cap="flat" cmpd="sng" algn="ctr">
+          <a:ln w="10267" cap="flat" cmpd="sng" algn="ctr">
             <a:solidFill>
               <a:srgbClr val="2F5496"/>
             </a:solidFill>
@@ -536,8 +536,8 @@
         </p:nvSpPr>
         <p:spPr>
           <a:xfrm>
-            <a:off x="1596810" y="3566620"/>
-            <a:ext cx="624119" cy="296259"/>
+            <a:off x="1168070" y="3622349"/>
+            <a:ext cx="389316" cy="184802"/>
           </a:xfrm>
           <a:prstGeom prst="rect">
             <a:avLst/>
@@ -550,7 +550,7 @@
           </a:ln>
         </p:spPr>
         <p:txBody>
-          <a:bodyPr rot="0" vert="horz" wrap="none" lIns="49377" tIns="0" rIns="49377" bIns="0" anchor="ctr" anchorCtr="1">
+          <a:bodyPr rot="0" vert="horz" wrap="none" lIns="30800" tIns="0" rIns="30800" bIns="0" anchor="ctr" anchorCtr="1">
             <a:noAutofit/>
           </a:bodyPr>
           <a:lstStyle/>
@@ -564,7 +564,7 @@
               </a:spcAft>
             </a:pPr>
             <a:r>
-              <a:rPr lang="en-US" sz="1037" dirty="0">
+              <a:rPr lang="en-US" sz="650" dirty="0">
                 <a:solidFill>
                   <a:srgbClr val="000000"/>
                 </a:solidFill>
@@ -585,13 +585,13 @@
         </p:nvCxnSpPr>
         <p:spPr>
           <a:xfrm>
-            <a:off x="6096000" y="3714750"/>
-            <a:ext cx="987531" cy="0"/>
+            <a:off x="3974592" y="3714750"/>
+            <a:ext cx="616006" cy="0"/>
           </a:xfrm>
           <a:prstGeom prst="line">
             <a:avLst/>
           </a:prstGeom>
-          <a:ln w="16459" cap="flat" cmpd="sng" algn="ctr">
+          <a:ln w="10267" cap="flat" cmpd="sng" algn="ctr">
             <a:solidFill>
               <a:srgbClr val="2F5496"/>
             </a:solidFill>
@@ -622,8 +622,8 @@
         </p:nvSpPr>
         <p:spPr>
           <a:xfrm>
-            <a:off x="6277706" y="3566620"/>
-            <a:ext cx="624119" cy="296259"/>
+            <a:off x="4087937" y="3622349"/>
+            <a:ext cx="389316" cy="184802"/>
           </a:xfrm>
           <a:prstGeom prst="rect">
             <a:avLst/>
@@ -636,7 +636,7 @@
           </a:ln>
         </p:spPr>
         <p:txBody>
-          <a:bodyPr rot="0" vert="horz" wrap="none" lIns="49377" tIns="0" rIns="49377" bIns="0" anchor="ctr" anchorCtr="1">
+          <a:bodyPr rot="0" vert="horz" wrap="none" lIns="30800" tIns="0" rIns="30800" bIns="0" anchor="ctr" anchorCtr="1">
             <a:noAutofit/>
           </a:bodyPr>
           <a:lstStyle/>
@@ -650,12 +650,107 @@
               </a:spcAft>
             </a:pPr>
             <a:r>
-              <a:rPr lang="en-US" sz="1037" dirty="0">
+              <a:rPr lang="en-US" sz="650" dirty="0">
                 <a:solidFill>
                   <a:srgbClr val="000000"/>
                 </a:solidFill>
               </a:rPr>
               <a:t>non</a:t>
+            </a:r>
+          </a:p>
+        </p:txBody>
+      </p:sp>
+      <p:sp>
+        <p:nvSpPr>
+          <p:cNvPr id="4" name="Mermaid source"/>
+          <p:cNvSpPr/>
+          <p:nvPr/>
+        </p:nvSpPr>
+        <p:spPr>
+          <a:xfrm>
+            <a:off x="7674864" y="1028700"/>
+            <a:ext cx="4059936" cy="5372100"/>
+          </a:xfrm>
+          <a:prstGeom prst="rect">
+            <a:avLst/>
+          </a:prstGeom>
+          <a:solidFill>
+            <a:srgbClr val="F3F4F6"/>
+          </a:solidFill>
+          <a:ln w="9525">
+            <a:solidFill>
+              <a:srgbClr val="D1D5DB"/>
+            </a:solidFill>
+          </a:ln>
+        </p:spPr>
+        <p:txBody>
+          <a:bodyPr wrap="square" lIns="91440" tIns="45720" rIns="91440" bIns="45720" anchor="t">
+            <a:noAutofit/>
+          </a:bodyPr>
+          <a:lstStyle/>
+          <a:p>
+            <a:pPr algn="l"/>
+            <a:r>
+              <a:rPr lang="en-US" sz="1400" dirty="0">
+                <a:solidFill>
+                  <a:srgbClr val="1F2937"/>
+                </a:solidFill>
+                <a:latin typeface="Consolas"/>
+                <a:cs typeface="Consolas"/>
+              </a:rPr>
+              <a:t>flowchart RL</a:t>
+            </a:r>
+          </a:p>
+          <a:p>
+            <a:pPr algn="l"/>
+            <a:r>
+              <a:rPr lang="en-US" sz="1400" dirty="0">
+                <a:solidFill>
+                  <a:srgbClr val="1F2937"/>
+                </a:solidFill>
+                <a:latin typeface="Consolas"/>
+                <a:cs typeface="Consolas"/>
+              </a:rPr>
+              <a:t>    Start[Debut] --&gt; Flag&gt;Etape asymetrique]</a:t>
+            </a:r>
+          </a:p>
+          <a:p>
+            <a:pPr algn="l"/>
+            <a:r>
+              <a:rPr lang="en-US" sz="1400" dirty="0">
+                <a:solidFill>
+                  <a:srgbClr val="1F2937"/>
+                </a:solidFill>
+                <a:latin typeface="Consolas"/>
+                <a:cs typeface="Consolas"/>
+              </a:rPr>
+              <a:t>    Flag --&gt; Check{Decision}</a:t>
+            </a:r>
+          </a:p>
+          <a:p>
+            <a:pPr algn="l"/>
+            <a:r>
+              <a:rPr lang="en-US" sz="1400" dirty="0">
+                <a:solidFill>
+                  <a:srgbClr val="1F2937"/>
+                </a:solidFill>
+                <a:latin typeface="Consolas"/>
+                <a:cs typeface="Consolas"/>
+              </a:rPr>
+              <a:t>    Check --&gt;|oui| End[Fin]</a:t>
+            </a:r>
+          </a:p>
+          <a:p>
+            <a:pPr algn="l"/>
+            <a:r>
+              <a:rPr lang="en-US" sz="1400" dirty="0">
+                <a:solidFill>
+                  <a:srgbClr val="1F2937"/>
+                </a:solidFill>
+                <a:latin typeface="Consolas"/>
+                <a:cs typeface="Consolas"/>
+              </a:rPr>
+              <a:t>    Check --&gt;|non| Flag</a:t>
             </a:r>
           </a:p>
         </p:txBody>
